--- a/docs/commercial/business-35-ai-media-education-dx/customer-package/Business35_OnePage_Offer_Source.pptx
+++ b/docs/commercial/business-35-ai-media-education-dx/customer-package/Business35_OnePage_Offer_Source.pptx
@@ -3887,13 +3887,24 @@
           <a:lstStyle/>
           <a:p>
             <a:r>
-              <a:rPr sz="900" b="0">
+              <a:rPr sz="1000" b="0">
                 <a:solidFill>
                   <a:srgbClr val="555A60"/>
                 </a:solidFill>
                 <a:latin typeface="Malgun Gothic"/>
               </a:rPr>
-              <a:t>CUSTOMER-FACING MASTER · FINAL IDENTITY REQUIRED · LEGAL REVIEW REQUIRED · NOT YET SENT  ·  제안 제공자 정보는 발송 전 최종 확정</a:t>
+              <a:t>CUSTOMER-FACING MASTER · FINAL IDENTITY REQUIRED · LEGAL REVIEW REQUIRED · NOT YET SENT</a:t>
+            </a:r>
+          </a:p>
+          <a:p>
+            <a:r>
+              <a:rPr sz="1000" b="0">
+                <a:solidFill>
+                  <a:srgbClr val="555A60"/>
+                </a:solidFill>
+                <a:latin typeface="Malgun Gothic"/>
+              </a:rPr>
+              <a:t>제공자 정보 최종 확정 필요 · 제안 제공자 정보는 발송 전 최종 확정</a:t>
             </a:r>
           </a:p>
           <a:p>

--- a/docs/commercial/business-35-ai-media-education-dx/customer-package/Business35_OnePage_Offer_Source.pptx
+++ b/docs/commercial/business-35-ai-media-education-dx/customer-package/Business35_OnePage_Offer_Source.pptx
@@ -3637,7 +3637,7 @@
         <p:spPr>
           <a:xfrm>
             <a:off x="502920" y="1463040"/>
-            <a:ext cx="11155680" cy="914400"/>
+            <a:ext cx="11155680" cy="685800"/>
           </a:xfrm>
           <a:prstGeom prst="rect">
             <a:avLst/>
@@ -3664,26 +3664,47 @@
       </p:sp>
       <p:sp>
         <p:nvSpPr>
-          <p:cNvPr id="5" name="TextBox 4"/>
-          <p:cNvSpPr txBox="1"/>
+          <p:cNvPr id="5" name="Rectangle 4"/>
+          <p:cNvSpPr/>
           <p:nvPr/>
         </p:nvSpPr>
         <p:spPr>
           <a:xfrm>
-            <a:off x="502920" y="2331720"/>
-            <a:ext cx="11155680" cy="1005840"/>
+            <a:off x="502920" y="2194560"/>
+            <a:ext cx="5486400" cy="3108960"/>
           </a:xfrm>
           <a:prstGeom prst="rect">
             <a:avLst/>
           </a:prstGeom>
-          <a:noFill/>
+          <a:solidFill>
+            <a:srgbClr val="FFFFFF"/>
+          </a:solidFill>
+          <a:ln w="12700">
+            <a:solidFill>
+              <a:srgbClr val="2E5E8C"/>
+            </a:solidFill>
+          </a:ln>
+          <a:effectLst/>
         </p:spPr>
-        <p:txBody>
-          <a:bodyPr wrap="square">
-            <a:spAutoFit/>
-          </a:bodyPr>
-          <a:lstStyle/>
-          <a:p>
+        <p:style>
+          <a:lnRef idx="1">
+            <a:schemeClr val="accent1"/>
+          </a:lnRef>
+          <a:fillRef idx="3">
+            <a:schemeClr val="accent1"/>
+          </a:fillRef>
+          <a:effectRef idx="2">
+            <a:schemeClr val="accent1"/>
+          </a:effectRef>
+          <a:fontRef idx="minor">
+            <a:schemeClr val="lt1"/>
+          </a:fontRef>
+        </p:style>
+        <p:txBody>
+          <a:bodyPr rtlCol="0" anchor="ctr" wrap="square" lIns="182880" tIns="137160"/>
+          <a:lstStyle/>
+          <a:p>
+            <a:pPr algn="ctr"/>
             <a:r>
               <a:rPr sz="1400" b="1">
                 <a:solidFill>
@@ -3696,39 +3717,159 @@
           </a:p>
           <a:p>
             <a:r>
-              <a:rPr sz="1300" b="0">
+              <a:rPr sz="1200" b="0">
                 <a:solidFill>
                   <a:srgbClr val="555A60"/>
                 </a:solidFill>
                 <a:latin typeface="Malgun Gothic"/>
               </a:rPr>
-              <a:t>홍보·교육·콘텐츠 제작 수작업 · AI 사용 개인 단위 · 검토·승인 기준 부재 · 개인정보·저작권·사람 검토 위험</a:t>
-            </a:r>
-          </a:p>
-        </p:txBody>
-      </p:sp>
-      <p:sp>
-        <p:nvSpPr>
-          <p:cNvPr id="6" name="TextBox 5"/>
-          <p:cNvSpPr txBox="1"/>
+              <a:t>• 수작업 콘텐츠 제작</a:t>
+            </a:r>
+          </a:p>
+          <a:p>
+            <a:r>
+              <a:rPr sz="1200" b="0">
+                <a:solidFill>
+                  <a:srgbClr val="555A60"/>
+                </a:solidFill>
+                <a:latin typeface="Malgun Gothic"/>
+              </a:rPr>
+              <a:t>• 개인별 AI 사용</a:t>
+            </a:r>
+          </a:p>
+          <a:p>
+            <a:r>
+              <a:rPr sz="1200" b="0">
+                <a:solidFill>
+                  <a:srgbClr val="555A60"/>
+                </a:solidFill>
+                <a:latin typeface="Malgun Gothic"/>
+              </a:rPr>
+              <a:t>• 검토·승인 기준 부재</a:t>
+            </a:r>
+          </a:p>
+          <a:p>
+            <a:r>
+              <a:rPr sz="1200" b="0">
+                <a:solidFill>
+                  <a:srgbClr val="555A60"/>
+                </a:solidFill>
+                <a:latin typeface="Malgun Gothic"/>
+              </a:rPr>
+              <a:t>• 개인정보·저작권 위험</a:t>
+            </a:r>
+          </a:p>
+          <a:p>
+            <a:r>
+              <a:rPr sz="1400" b="1">
+                <a:solidFill>
+                  <a:srgbClr val="2E5E8C"/>
+                </a:solidFill>
+                <a:latin typeface="Malgun Gothic"/>
+              </a:rPr>
+              <a:t>Business 35 방식</a:t>
+            </a:r>
+          </a:p>
+          <a:p>
+            <a:r>
+              <a:rPr sz="1200" b="0">
+                <a:solidFill>
+                  <a:srgbClr val="1F3A5F"/>
+                </a:solidFill>
+                <a:latin typeface="Malgun Gothic"/>
+              </a:rPr>
+              <a:t>• 진단 → 직무 교육</a:t>
+            </a:r>
+          </a:p>
+          <a:p>
+            <a:r>
+              <a:rPr sz="1200" b="0">
+                <a:solidFill>
+                  <a:srgbClr val="1F3A5F"/>
+                </a:solidFill>
+                <a:latin typeface="Malgun Gothic"/>
+              </a:rPr>
+              <a:t>• 실제 업무 실습</a:t>
+            </a:r>
+          </a:p>
+          <a:p>
+            <a:r>
+              <a:rPr sz="1200" b="0">
+                <a:solidFill>
+                  <a:srgbClr val="1F3A5F"/>
+                </a:solidFill>
+                <a:latin typeface="Malgun Gothic"/>
+              </a:rPr>
+              <a:t>• 워크플로 재설계</a:t>
+            </a:r>
+          </a:p>
+          <a:p>
+            <a:r>
+              <a:rPr sz="1200" b="0">
+                <a:solidFill>
+                  <a:srgbClr val="1F3A5F"/>
+                </a:solidFill>
+                <a:latin typeface="Malgun Gothic"/>
+              </a:rPr>
+              <a:t>• 제한 파일럿</a:t>
+            </a:r>
+          </a:p>
+          <a:p>
+            <a:r>
+              <a:rPr sz="1200" b="0">
+                <a:solidFill>
+                  <a:srgbClr val="1F3A5F"/>
+                </a:solidFill>
+                <a:latin typeface="Malgun Gothic"/>
+              </a:rPr>
+              <a:t>• 성과 측정 · 운영 플레이북</a:t>
+            </a:r>
+          </a:p>
+        </p:txBody>
+      </p:sp>
+      <p:sp>
+        <p:nvSpPr>
+          <p:cNvPr id="6" name="Rectangle 5"/>
+          <p:cNvSpPr/>
           <p:nvPr/>
         </p:nvSpPr>
         <p:spPr>
           <a:xfrm>
-            <a:off x="502920" y="3291840"/>
-            <a:ext cx="11155680" cy="822960"/>
+            <a:off x="6172200" y="2194560"/>
+            <a:ext cx="5486400" cy="3108960"/>
           </a:xfrm>
           <a:prstGeom prst="rect">
             <a:avLst/>
           </a:prstGeom>
-          <a:noFill/>
+          <a:solidFill>
+            <a:srgbClr val="FFFFFF"/>
+          </a:solidFill>
+          <a:ln w="12700">
+            <a:solidFill>
+              <a:srgbClr val="2E5E8C"/>
+            </a:solidFill>
+          </a:ln>
+          <a:effectLst/>
         </p:spPr>
-        <p:txBody>
-          <a:bodyPr wrap="square">
-            <a:spAutoFit/>
-          </a:bodyPr>
-          <a:lstStyle/>
-          <a:p>
+        <p:style>
+          <a:lnRef idx="1">
+            <a:schemeClr val="accent1"/>
+          </a:lnRef>
+          <a:fillRef idx="3">
+            <a:schemeClr val="accent1"/>
+          </a:fillRef>
+          <a:effectRef idx="2">
+            <a:schemeClr val="accent1"/>
+          </a:effectRef>
+          <a:fontRef idx="minor">
+            <a:schemeClr val="lt1"/>
+          </a:fontRef>
+        </p:style>
+        <p:txBody>
+          <a:bodyPr rtlCol="0" anchor="ctr" wrap="square" lIns="182880" tIns="137160"/>
+          <a:lstStyle/>
+          <a:p>
+            <a:pPr algn="ctr"/>
             <a:r>
               <a:rPr sz="1400" b="1">
                 <a:solidFill>
@@ -3736,92 +3877,102 @@
                 </a:solidFill>
                 <a:latin typeface="Malgun Gothic"/>
               </a:rPr>
-              <a:t>7단계 방식</a:t>
-            </a:r>
-          </a:p>
-          <a:p>
-            <a:r>
-              <a:rPr sz="1300" b="0">
-                <a:solidFill>
-                  <a:srgbClr val="1F3A5F"/>
+              <a:t>상품 A · 진단 워크숍</a:t>
+            </a:r>
+          </a:p>
+          <a:p>
+            <a:r>
+              <a:rPr sz="1200" b="0">
+                <a:solidFill>
+                  <a:srgbClr val="555A60"/>
                 </a:solidFill>
                 <a:latin typeface="Malgun Gothic"/>
               </a:rPr>
-              <a:t>진단 → 직무 교육 → 실제 실습 → 워크플로 재설계 → 제한 파일럿 → 성과 측정 → 운영 플레이북</a:t>
-            </a:r>
-          </a:p>
-        </p:txBody>
-      </p:sp>
-      <p:sp>
-        <p:nvSpPr>
-          <p:cNvPr id="7" name="TextBox 6"/>
-          <p:cNvSpPr txBox="1"/>
-          <p:nvPr/>
-        </p:nvSpPr>
-        <p:spPr>
-          <a:xfrm>
-            <a:off x="502920" y="4069080"/>
-            <a:ext cx="11155680" cy="1051560"/>
-          </a:xfrm>
-          <a:prstGeom prst="rect">
-            <a:avLst/>
-          </a:prstGeom>
-          <a:noFill/>
-        </p:spPr>
-        <p:txBody>
-          <a:bodyPr wrap="square">
-            <a:spAutoFit/>
-          </a:bodyPr>
-          <a:lstStyle/>
-          <a:p>
-            <a:r>
-              <a:rPr sz="1400" b="1">
-                <a:solidFill>
-                  <a:srgbClr val="2E5E8C"/>
+              <a:t>• 1~2일 · 초기 제안 300만~500만원</a:t>
+            </a:r>
+          </a:p>
+          <a:p>
+            <a:r>
+              <a:rPr sz="1200" b="0">
+                <a:solidFill>
+                  <a:srgbClr val="555A60"/>
                 </a:solidFill>
                 <a:latin typeface="Malgun Gothic"/>
               </a:rPr>
-              <a:t>상품 A / B / C</a:t>
-            </a:r>
-          </a:p>
-          <a:p>
-            <a:r>
-              <a:rPr sz="1300" b="0">
+              <a:t>• 현재 흐름 진단 · 후보 선정 · 위험 분리</a:t>
+            </a:r>
+          </a:p>
+          <a:p>
+            <a:r>
+              <a:rPr sz="1200" b="0">
                 <a:solidFill>
                   <a:srgbClr val="555A60"/>
                 </a:solidFill>
                 <a:latin typeface="Malgun Gothic"/>
               </a:rPr>
-              <a:t>A 진단 워크숍 300만–800만원 (초기 300만–500만원)</a:t>
-            </a:r>
-          </a:p>
-          <a:p>
-            <a:r>
-              <a:rPr sz="1300" b="0">
-                <a:solidFill>
-                  <a:srgbClr val="555A60"/>
+              <a:t>• 직무별 실습 · 경영진 결과 보고</a:t>
+            </a:r>
+          </a:p>
+          <a:p>
+            <a:r>
+              <a:rPr sz="1400" b="1">
+                <a:solidFill>
+                  <a:srgbClr val="2E5E8C"/>
                 </a:solidFill>
                 <a:latin typeface="Malgun Gothic"/>
               </a:rPr>
-              <a:t>B 디자인 파트너 파일럿 1,000만–1,500만원 · B 표준 6주 파일럿 1,500만–2,500만원</a:t>
-            </a:r>
-          </a:p>
-          <a:p>
-            <a:r>
-              <a:rPr sz="1300" b="0">
+              <a:t>상품 B · 6주 파일럿</a:t>
+            </a:r>
+          </a:p>
+          <a:p>
+            <a:r>
+              <a:rPr sz="1200" b="0">
                 <a:solidFill>
                   <a:srgbClr val="555A60"/>
                 </a:solidFill>
                 <a:latin typeface="Malgun Gothic"/>
               </a:rPr>
-              <a:t>C 조직 운영 자문 월 300만–600만원</a:t>
-            </a:r>
-          </a:p>
-        </p:txBody>
-      </p:sp>
-      <p:sp>
-        <p:nvSpPr>
-          <p:cNvPr id="8" name="TextBox 7"/>
+              <a:t>• 1개 팀 · 1개 업무 · 디자인 파트너 1,000만~1,500만원</a:t>
+            </a:r>
+          </a:p>
+          <a:p>
+            <a:r>
+              <a:rPr sz="1200" b="0">
+                <a:solidFill>
+                  <a:srgbClr val="555A60"/>
+                </a:solidFill>
+                <a:latin typeface="Malgun Gothic"/>
+              </a:rPr>
+              <a:t>• 표준 6주 파일럿 1,500만~2,500만원</a:t>
+            </a:r>
+          </a:p>
+          <a:p>
+            <a:r>
+              <a:rPr sz="1200" b="0">
+                <a:solidFill>
+                  <a:srgbClr val="555A60"/>
+                </a:solidFill>
+                <a:latin typeface="Malgun Gothic"/>
+              </a:rPr>
+              <a:t>• 기준선 · 교육 · 재설계 · 파일럿 · 성과·위험 보고 · 플레이북</a:t>
+            </a:r>
+          </a:p>
+          <a:p>
+            <a:r>
+              <a:rPr sz="1400" b="1">
+                <a:solidFill>
+                  <a:srgbClr val="2E5E8C"/>
+                </a:solidFill>
+                <a:latin typeface="Malgun Gothic"/>
+              </a:rPr>
+              <a:t>상품 C · 운영 자문 · 월 300만~600만원</a:t>
+            </a:r>
+          </a:p>
+        </p:txBody>
+      </p:sp>
+      <p:sp>
+        <p:nvSpPr>
+          <p:cNvPr id="7" name="TextBox 6"/>
           <p:cNvSpPr txBox="1"/>
           <p:nvPr/>
         </p:nvSpPr>
@@ -3866,7 +4017,7 @@
       </p:sp>
       <p:sp>
         <p:nvSpPr>
-          <p:cNvPr id="9" name="TextBox 8"/>
+          <p:cNvPr id="8" name="TextBox 7"/>
           <p:cNvSpPr txBox="1"/>
           <p:nvPr/>
         </p:nvSpPr>

--- a/docs/commercial/business-35-ai-media-education-dx/customer-package/Business35_OnePage_Offer_Source.pptx
+++ b/docs/commercial/business-35-ai-media-education-dx/customer-package/Business35_OnePage_Offer_Source.pptx
@@ -3636,8 +3636,8 @@
         </p:nvSpPr>
         <p:spPr>
           <a:xfrm>
-            <a:off x="502920" y="1463040"/>
-            <a:ext cx="11155680" cy="685800"/>
+            <a:off x="502920" y="1371600"/>
+            <a:ext cx="11155680" cy="548640"/>
           </a:xfrm>
           <a:prstGeom prst="rect">
             <a:avLst/>
@@ -3651,7 +3651,7 @@
           <a:lstStyle/>
           <a:p>
             <a:r>
-              <a:rPr sz="1600" b="1">
+              <a:rPr sz="1500" b="1">
                 <a:solidFill>
                   <a:srgbClr val="1F3A5F"/>
                 </a:solidFill>
@@ -3670,8 +3670,8 @@
         </p:nvSpPr>
         <p:spPr>
           <a:xfrm>
-            <a:off x="502920" y="2194560"/>
-            <a:ext cx="5486400" cy="3108960"/>
+            <a:off x="502920" y="1965960"/>
+            <a:ext cx="5486400" cy="2743200"/>
           </a:xfrm>
           <a:prstGeom prst="rect">
             <a:avLst/>
@@ -3701,12 +3701,12 @@
           </a:fontRef>
         </p:style>
         <p:txBody>
-          <a:bodyPr rtlCol="0" anchor="ctr" wrap="square" lIns="182880" tIns="137160"/>
+          <a:bodyPr rtlCol="0" anchor="ctr" wrap="square" lIns="182880" rIns="182880" tIns="109728"/>
           <a:lstStyle/>
           <a:p>
             <a:pPr algn="ctr"/>
             <a:r>
-              <a:rPr sz="1400" b="1">
+              <a:rPr sz="1300" b="1">
                 <a:solidFill>
                   <a:srgbClr val="2E5E8C"/>
                 </a:solidFill>
@@ -3717,7 +3717,7 @@
           </a:p>
           <a:p>
             <a:r>
-              <a:rPr sz="1200" b="0">
+              <a:rPr sz="1100" b="0">
                 <a:solidFill>
                   <a:srgbClr val="555A60"/>
                 </a:solidFill>
@@ -3728,7 +3728,7 @@
           </a:p>
           <a:p>
             <a:r>
-              <a:rPr sz="1200" b="0">
+              <a:rPr sz="1100" b="0">
                 <a:solidFill>
                   <a:srgbClr val="555A60"/>
                 </a:solidFill>
@@ -3739,7 +3739,7 @@
           </a:p>
           <a:p>
             <a:r>
-              <a:rPr sz="1200" b="0">
+              <a:rPr sz="1100" b="0">
                 <a:solidFill>
                   <a:srgbClr val="555A60"/>
                 </a:solidFill>
@@ -3750,7 +3750,7 @@
           </a:p>
           <a:p>
             <a:r>
-              <a:rPr sz="1200" b="0">
+              <a:rPr sz="1100" b="0">
                 <a:solidFill>
                   <a:srgbClr val="555A60"/>
                 </a:solidFill>
@@ -3760,8 +3760,13 @@
             </a:r>
           </a:p>
           <a:p>
-            <a:r>
-              <a:rPr sz="1400" b="1">
+            <a:pPr>
+              <a:spcBef>
+                <a:spcPts val="600"/>
+              </a:spcBef>
+            </a:pPr>
+            <a:r>
+              <a:rPr sz="1300" b="1">
                 <a:solidFill>
                   <a:srgbClr val="2E5E8C"/>
                 </a:solidFill>
@@ -3772,57 +3777,35 @@
           </a:p>
           <a:p>
             <a:r>
-              <a:rPr sz="1200" b="0">
+              <a:rPr sz="1100" b="0">
                 <a:solidFill>
                   <a:srgbClr val="1F3A5F"/>
                 </a:solidFill>
                 <a:latin typeface="Malgun Gothic"/>
               </a:rPr>
-              <a:t>• 진단 → 직무 교육</a:t>
-            </a:r>
-          </a:p>
-          <a:p>
-            <a:r>
-              <a:rPr sz="1200" b="0">
+              <a:t>• 진단 → 직무 교육 → 실제 실습</a:t>
+            </a:r>
+          </a:p>
+          <a:p>
+            <a:r>
+              <a:rPr sz="1100" b="0">
                 <a:solidFill>
                   <a:srgbClr val="1F3A5F"/>
                 </a:solidFill>
                 <a:latin typeface="Malgun Gothic"/>
               </a:rPr>
-              <a:t>• 실제 업무 실습</a:t>
-            </a:r>
-          </a:p>
-          <a:p>
-            <a:r>
-              <a:rPr sz="1200" b="0">
+              <a:t>• 워크플로 재설계 → 제한 파일럿</a:t>
+            </a:r>
+          </a:p>
+          <a:p>
+            <a:r>
+              <a:rPr sz="1100" b="0">
                 <a:solidFill>
                   <a:srgbClr val="1F3A5F"/>
                 </a:solidFill>
                 <a:latin typeface="Malgun Gothic"/>
               </a:rPr>
-              <a:t>• 워크플로 재설계</a:t>
-            </a:r>
-          </a:p>
-          <a:p>
-            <a:r>
-              <a:rPr sz="1200" b="0">
-                <a:solidFill>
-                  <a:srgbClr val="1F3A5F"/>
-                </a:solidFill>
-                <a:latin typeface="Malgun Gothic"/>
-              </a:rPr>
-              <a:t>• 제한 파일럿</a:t>
-            </a:r>
-          </a:p>
-          <a:p>
-            <a:r>
-              <a:rPr sz="1200" b="0">
-                <a:solidFill>
-                  <a:srgbClr val="1F3A5F"/>
-                </a:solidFill>
-                <a:latin typeface="Malgun Gothic"/>
-              </a:rPr>
-              <a:t>• 성과 측정 · 운영 플레이북</a:t>
+              <a:t>• 성과 측정 → 운영 플레이북</a:t>
             </a:r>
           </a:p>
         </p:txBody>
@@ -3835,8 +3818,8 @@
         </p:nvSpPr>
         <p:spPr>
           <a:xfrm>
-            <a:off x="6172200" y="2194560"/>
-            <a:ext cx="5486400" cy="3108960"/>
+            <a:off x="6172200" y="1965960"/>
+            <a:ext cx="5486400" cy="2743200"/>
           </a:xfrm>
           <a:prstGeom prst="rect">
             <a:avLst/>
@@ -3866,12 +3849,12 @@
           </a:fontRef>
         </p:style>
         <p:txBody>
-          <a:bodyPr rtlCol="0" anchor="ctr" wrap="square" lIns="182880" tIns="137160"/>
+          <a:bodyPr rtlCol="0" anchor="ctr" wrap="square" lIns="182880" rIns="182880" tIns="109728"/>
           <a:lstStyle/>
           <a:p>
             <a:pPr algn="ctr"/>
             <a:r>
-              <a:rPr sz="1400" b="1">
+              <a:rPr sz="1300" b="1">
                 <a:solidFill>
                   <a:srgbClr val="2E5E8C"/>
                 </a:solidFill>
@@ -3882,7 +3865,7 @@
           </a:p>
           <a:p>
             <a:r>
-              <a:rPr sz="1200" b="0">
+              <a:rPr sz="1100" b="0">
                 <a:solidFill>
                   <a:srgbClr val="555A60"/>
                 </a:solidFill>
@@ -3893,7 +3876,7 @@
           </a:p>
           <a:p>
             <a:r>
-              <a:rPr sz="1200" b="0">
+              <a:rPr sz="1100" b="0">
                 <a:solidFill>
                   <a:srgbClr val="555A60"/>
                 </a:solidFill>
@@ -3903,19 +3886,13 @@
             </a:r>
           </a:p>
           <a:p>
-            <a:r>
-              <a:rPr sz="1200" b="0">
-                <a:solidFill>
-                  <a:srgbClr val="555A60"/>
-                </a:solidFill>
-                <a:latin typeface="Malgun Gothic"/>
-              </a:rPr>
-              <a:t>• 직무별 실습 · 경영진 결과 보고</a:t>
-            </a:r>
-          </a:p>
-          <a:p>
-            <a:r>
-              <a:rPr sz="1400" b="1">
+            <a:pPr>
+              <a:spcBef>
+                <a:spcPts val="600"/>
+              </a:spcBef>
+            </a:pPr>
+            <a:r>
+              <a:rPr sz="1300" b="1">
                 <a:solidFill>
                   <a:srgbClr val="2E5E8C"/>
                 </a:solidFill>
@@ -3926,18 +3903,18 @@
           </a:p>
           <a:p>
             <a:r>
-              <a:rPr sz="1200" b="0">
+              <a:rPr sz="1100" b="0">
                 <a:solidFill>
                   <a:srgbClr val="555A60"/>
                 </a:solidFill>
                 <a:latin typeface="Malgun Gothic"/>
               </a:rPr>
-              <a:t>• 1개 팀 · 1개 업무 · 디자인 파트너 1,000만~1,500만원</a:t>
-            </a:r>
-          </a:p>
-          <a:p>
-            <a:r>
-              <a:rPr sz="1200" b="0">
+              <a:t>• 디자인 파트너 1,000만~1,500만원</a:t>
+            </a:r>
+          </a:p>
+          <a:p>
+            <a:r>
+              <a:rPr sz="1100" b="0">
                 <a:solidFill>
                   <a:srgbClr val="555A60"/>
                 </a:solidFill>
@@ -3948,18 +3925,23 @@
           </a:p>
           <a:p>
             <a:r>
-              <a:rPr sz="1200" b="0">
+              <a:rPr sz="1100" b="0">
                 <a:solidFill>
                   <a:srgbClr val="555A60"/>
                 </a:solidFill>
                 <a:latin typeface="Malgun Gothic"/>
               </a:rPr>
-              <a:t>• 기준선 · 교육 · 재설계 · 파일럿 · 성과·위험 보고 · 플레이북</a:t>
-            </a:r>
-          </a:p>
-          <a:p>
-            <a:r>
-              <a:rPr sz="1400" b="1">
+              <a:t>• 기준선·교육·재설계·파일럿·성과·플레이북</a:t>
+            </a:r>
+          </a:p>
+          <a:p>
+            <a:pPr>
+              <a:spcBef>
+                <a:spcPts val="600"/>
+              </a:spcBef>
+            </a:pPr>
+            <a:r>
+              <a:rPr sz="1300" b="1">
                 <a:solidFill>
                   <a:srgbClr val="2E5E8C"/>
                 </a:solidFill>
@@ -3978,7 +3960,7 @@
         </p:nvSpPr>
         <p:spPr>
           <a:xfrm>
-            <a:off x="502920" y="5257800"/>
+            <a:off x="502920" y="4892040"/>
             <a:ext cx="11155680" cy="822960"/>
           </a:xfrm>
           <a:prstGeom prst="rect">
@@ -4003,8 +3985,13 @@
             </a:r>
           </a:p>
           <a:p>
-            <a:r>
-              <a:rPr sz="1300" b="0">
+            <a:pPr>
+              <a:spcBef>
+                <a:spcPts val="400"/>
+              </a:spcBef>
+            </a:pPr>
+            <a:r>
+              <a:rPr sz="1200" b="0">
                 <a:solidFill>
                   <a:srgbClr val="555A60"/>
                 </a:solidFill>
@@ -4023,8 +4010,8 @@
         </p:nvSpPr>
         <p:spPr>
           <a:xfrm>
-            <a:off x="502920" y="6263640"/>
-            <a:ext cx="11155680" cy="457200"/>
+            <a:off x="502920" y="5897880"/>
+            <a:ext cx="11155680" cy="777240"/>
           </a:xfrm>
           <a:prstGeom prst="rect">
             <a:avLst/>
@@ -4038,7 +4025,7 @@
           <a:lstStyle/>
           <a:p>
             <a:r>
-              <a:rPr sz="1000" b="0">
+              <a:rPr sz="900" b="0">
                 <a:solidFill>
                   <a:srgbClr val="555A60"/>
                 </a:solidFill>
@@ -4049,7 +4036,7 @@
           </a:p>
           <a:p>
             <a:r>
-              <a:rPr sz="1000" b="0">
+              <a:rPr sz="900" b="0">
                 <a:solidFill>
                   <a:srgbClr val="555A60"/>
                 </a:solidFill>

--- a/docs/commercial/business-35-ai-media-education-dx/customer-package/Business35_OnePage_Offer_Source.pptx
+++ b/docs/commercial/business-35-ai-media-education-dx/customer-package/Business35_OnePage_Offer_Source.pptx
@@ -3871,7 +3871,7 @@
                 </a:solidFill>
                 <a:latin typeface="Malgun Gothic"/>
               </a:rPr>
-              <a:t>• 1~2일 · 초기 제안 300만~500만원</a:t>
+              <a:t>• 1~2일 · 초기형 300만~500만원 · 확장형 500만~800만원</a:t>
             </a:r>
           </a:p>
           <a:p>
@@ -3898,7 +3898,7 @@
                 </a:solidFill>
                 <a:latin typeface="Malgun Gothic"/>
               </a:rPr>
-              <a:t>상품 B · 6주 파일럿</a:t>
+              <a:t>상품 B1 · 디자인 파트너 파일럿</a:t>
             </a:r>
           </a:p>
           <a:p>
@@ -3909,7 +3909,23 @@
                 </a:solidFill>
                 <a:latin typeface="Malgun Gothic"/>
               </a:rPr>
-              <a:t>• 디자인 파트너 1,000만~1,500만원</a:t>
+              <a:t>• 6주 · 1팀 · 1업무 · 1,000만~1,500만원</a:t>
+            </a:r>
+          </a:p>
+          <a:p>
+            <a:pPr>
+              <a:spcBef>
+                <a:spcPts val="400"/>
+              </a:spcBef>
+            </a:pPr>
+            <a:r>
+              <a:rPr sz="1300" b="1">
+                <a:solidFill>
+                  <a:srgbClr val="2E5E8C"/>
+                </a:solidFill>
+                <a:latin typeface="Malgun Gothic"/>
+              </a:rPr>
+              <a:t>상품 B2 · 표준 6주 파일럿</a:t>
             </a:r>
           </a:p>
           <a:p>
@@ -3920,7 +3936,7 @@
                 </a:solidFill>
                 <a:latin typeface="Malgun Gothic"/>
               </a:rPr>
-              <a:t>• 표준 6주 파일럿 1,500만~2,500만원</a:t>
+              <a:t>• 6주 · 1,500만~2,500만원</a:t>
             </a:r>
           </a:p>
           <a:p>
@@ -4031,7 +4047,7 @@
                 </a:solidFill>
                 <a:latin typeface="Malgun Gothic"/>
               </a:rPr>
-              <a:t>CUSTOMER-FACING MASTER · FINAL IDENTITY REQUIRED · LEGAL REVIEW REQUIRED · NOT YET SENT</a:t>
+              <a:t>DRAFT · 제공자 정보 최종 확정 필요</a:t>
             </a:r>
           </a:p>
           <a:p>
@@ -4042,18 +4058,7 @@
                 </a:solidFill>
                 <a:latin typeface="Malgun Gothic"/>
               </a:rPr>
-              <a:t>제공자 정보 최종 확정 필요 · 제안 제공자 정보는 발송 전 최종 확정</a:t>
-            </a:r>
-          </a:p>
-          <a:p>
-            <a:r>
-              <a:rPr sz="900" b="0">
-                <a:solidFill>
-                  <a:srgbClr val="555A60"/>
-                </a:solidFill>
-                <a:latin typeface="Malgun Gothic"/>
-              </a:rPr>
-              <a:t>가격은 시장 검증 전 자사 가격 가설 · 범위와 인원·기간에 따라 최종 견적 · VAT는 최종 견적서에서 확정</a:t>
+              <a:t>가격은 시장 검증 전 가설이며 범위·인원·기간에 따라 달라질 수 있습니다.</a:t>
             </a:r>
           </a:p>
         </p:txBody>

--- a/docs/commercial/business-35-ai-media-education-dx/customer-package/Business35_OnePage_Offer_Source.pptx
+++ b/docs/commercial/business-35-ai-media-education-dx/customer-package/Business35_OnePage_Offer_Source.pptx
@@ -3626,6 +3626,17 @@
               <a:t>AI 업무전환 프로그램 — 1페이지 소개</a:t>
             </a:r>
           </a:p>
+          <a:p>
+            <a:r>
+              <a:rPr sz="1300" b="1">
+                <a:solidFill>
+                  <a:srgbClr val="C9D6E3"/>
+                </a:solidFill>
+                <a:latin typeface="Malgun Gothic"/>
+              </a:rPr>
+              <a:t>제공: 파디엠</a:t>
+            </a:r>
+          </a:p>
         </p:txBody>
       </p:sp>
       <p:sp>
@@ -4047,7 +4058,7 @@
                 </a:solidFill>
                 <a:latin typeface="Malgun Gothic"/>
               </a:rPr>
-              <a:t>DRAFT · 제공자 정보 최종 확정 필요</a:t>
+              <a:t>파디엠 · DRAFT</a:t>
             </a:r>
           </a:p>
           <a:p>

--- a/docs/commercial/business-35-ai-media-education-dx/customer-package/Business35_OnePage_Offer_Source.pptx
+++ b/docs/commercial/business-35-ai-media-education-dx/customer-package/Business35_OnePage_Offer_Source.pptx
@@ -3662,13 +3662,13 @@
           <a:lstStyle/>
           <a:p>
             <a:r>
-              <a:rPr sz="1500" b="1">
+              <a:rPr sz="1400" b="1">
                 <a:solidFill>
                   <a:srgbClr val="1F3A5F"/>
                 </a:solidFill>
                 <a:latin typeface="Malgun Gothic"/>
               </a:rPr>
-              <a:t>교육에서 끝나지 않고, 실제 업무 진단·실습·워크플로 재설계·파일럿·측정·운영 플레이북까지 연결합니다.</a:t>
+              <a:t>조직의 실제 미디어 업무 한 흐름을 입력하면, AI 적용 후보·사람 검토 지점·추천 파일럿·운영 산출물을 한 번에 구성한다.</a:t>
             </a:r>
           </a:p>
         </p:txBody>
@@ -3717,106 +3717,79 @@
           <a:p>
             <a:pPr algn="ctr"/>
             <a:r>
-              <a:rPr sz="1300" b="1">
+              <a:rPr sz="1200" b="1">
                 <a:solidFill>
                   <a:srgbClr val="2E5E8C"/>
                 </a:solidFill>
                 <a:latin typeface="Malgun Gothic"/>
               </a:rPr>
-              <a:t>고객의 현재 문제</a:t>
-            </a:r>
-          </a:p>
-          <a:p>
-            <a:r>
-              <a:rPr sz="1100" b="0">
-                <a:solidFill>
-                  <a:srgbClr val="555A60"/>
-                </a:solidFill>
-                <a:latin typeface="Malgun Gothic"/>
-              </a:rPr>
-              <a:t>• 수작업 콘텐츠 제작</a:t>
-            </a:r>
-          </a:p>
-          <a:p>
-            <a:r>
-              <a:rPr sz="1100" b="0">
-                <a:solidFill>
-                  <a:srgbClr val="555A60"/>
-                </a:solidFill>
-                <a:latin typeface="Malgun Gothic"/>
-              </a:rPr>
-              <a:t>• 개인별 AI 사용</a:t>
-            </a:r>
-          </a:p>
-          <a:p>
-            <a:r>
-              <a:rPr sz="1100" b="0">
-                <a:solidFill>
-                  <a:srgbClr val="555A60"/>
-                </a:solidFill>
-                <a:latin typeface="Malgun Gothic"/>
-              </a:rPr>
-              <a:t>• 검토·승인 기준 부재</a:t>
-            </a:r>
-          </a:p>
-          <a:p>
-            <a:r>
-              <a:rPr sz="1100" b="0">
-                <a:solidFill>
-                  <a:srgbClr val="555A60"/>
-                </a:solidFill>
-                <a:latin typeface="Malgun Gothic"/>
-              </a:rPr>
-              <a:t>• 개인정보·저작권 위험</a:t>
-            </a:r>
-          </a:p>
-          <a:p>
-            <a:pPr>
-              <a:spcBef>
-                <a:spcPts val="600"/>
-              </a:spcBef>
-            </a:pPr>
-            <a:r>
-              <a:rPr sz="1300" b="1">
-                <a:solidFill>
-                  <a:srgbClr val="2E5E8C"/>
-                </a:solidFill>
-                <a:latin typeface="Malgun Gothic"/>
-              </a:rPr>
-              <a:t>Business 35 방식</a:t>
-            </a:r>
-          </a:p>
-          <a:p>
-            <a:r>
-              <a:rPr sz="1100" b="0">
+              <a:t>사용자가 실제로 하는 일 (V3.1)</a:t>
+            </a:r>
+          </a:p>
+          <a:p>
+            <a:r>
+              <a:rPr sz="1000" b="0">
                 <a:solidFill>
                   <a:srgbClr val="1F3A5F"/>
                 </a:solidFill>
                 <a:latin typeface="Malgun Gothic"/>
               </a:rPr>
-              <a:t>• 진단 → 직무 교육 → 실제 실습</a:t>
-            </a:r>
-          </a:p>
-          <a:p>
-            <a:r>
-              <a:rPr sz="1100" b="0">
+              <a:t>• 현재 미디어 업무의 병목을 확인한다</a:t>
+            </a:r>
+          </a:p>
+          <a:p>
+            <a:r>
+              <a:rPr sz="1000" b="0">
                 <a:solidFill>
                   <a:srgbClr val="1F3A5F"/>
                 </a:solidFill>
                 <a:latin typeface="Malgun Gothic"/>
               </a:rPr>
-              <a:t>• 워크플로 재설계 → 제한 파일럿</a:t>
-            </a:r>
-          </a:p>
-          <a:p>
-            <a:r>
-              <a:rPr sz="1100" b="0">
+              <a:t>• 조직·결과물·병목·팀 규모·AI 사용 상태를 입력한다</a:t>
+            </a:r>
+          </a:p>
+          <a:p>
+            <a:r>
+              <a:rPr sz="1000" b="0">
                 <a:solidFill>
                   <a:srgbClr val="1F3A5F"/>
                 </a:solidFill>
                 <a:latin typeface="Malgun Gothic"/>
               </a:rPr>
-              <a:t>• 성과 측정 → 운영 플레이북</a:t>
+              <a:t>• 조직별 진단과 새 업무 흐름을 확인한다</a:t>
+            </a:r>
+          </a:p>
+          <a:p>
+            <a:r>
+              <a:rPr sz="1000" b="0">
+                <a:solidFill>
+                  <a:srgbClr val="1F3A5F"/>
+                </a:solidFill>
+                <a:latin typeface="Malgun Gothic"/>
+              </a:rPr>
+              <a:t>• 사람 검토 지점과 운영 산출물을 확인한다</a:t>
+            </a:r>
+          </a:p>
+          <a:p>
+            <a:r>
+              <a:rPr sz="1000" b="0">
+                <a:solidFill>
+                  <a:srgbClr val="1F3A5F"/>
+                </a:solidFill>
+                <a:latin typeface="Malgun Gothic"/>
+              </a:rPr>
+              <a:t>• 추천된 진단 워크숍 또는 6주 파일럿 범위를 판단한다</a:t>
+            </a:r>
+          </a:p>
+          <a:p>
+            <a:r>
+              <a:rPr sz="1000" b="0">
+                <a:solidFill>
+                  <a:srgbClr val="1F3A5F"/>
+                </a:solidFill>
+                <a:latin typeface="Malgun Gothic"/>
+              </a:rPr>
+              <a:t>• 자기 조직용 전환 요약으로 상담을 준비한다</a:t>
             </a:r>
           </a:p>
         </p:txBody>
@@ -3882,7 +3855,7 @@
                 </a:solidFill>
                 <a:latin typeface="Malgun Gothic"/>
               </a:rPr>
-              <a:t>• 1~2일 · 초기형 300만~500만원 · 확장형 500만~800만원</a:t>
+              <a:t>• 1~2일 · 초기형 300만–500만원 · 확장형 500만–800만원</a:t>
             </a:r>
           </a:p>
           <a:p>
@@ -3920,7 +3893,7 @@
                 </a:solidFill>
                 <a:latin typeface="Malgun Gothic"/>
               </a:rPr>
-              <a:t>• 6주 · 1팀 · 1업무 · 1,000만~1,500만원</a:t>
+              <a:t>• 6주 · 1팀 · 1업무 · 1,000만–1,500만원</a:t>
             </a:r>
           </a:p>
           <a:p>
@@ -3947,7 +3920,7 @@
                 </a:solidFill>
                 <a:latin typeface="Malgun Gothic"/>
               </a:rPr>
-              <a:t>• 6주 · 1,500만~2,500만원</a:t>
+              <a:t>• 6주 · 1,500만–2,500만원</a:t>
             </a:r>
           </a:p>
           <a:p>
@@ -3974,7 +3947,7 @@
                 </a:solidFill>
                 <a:latin typeface="Malgun Gothic"/>
               </a:rPr>
-              <a:t>상품 C · 운영 자문 · 월 300만~600만원</a:t>
+              <a:t>상품 C · 운영 자문 · 월 300만–600만원</a:t>
             </a:r>
           </a:p>
         </p:txBody>
@@ -4008,7 +3981,7 @@
                 </a:solidFill>
                 <a:latin typeface="Malgun Gothic"/>
               </a:rPr>
-              <a:t>다음 행동</a:t>
+              <a:t>다음 행동: 진단 워크숍 또는 6주 파일럿 범위 확인</a:t>
             </a:r>
           </a:p>
           <a:p>
@@ -4024,7 +3997,7 @@
                 </a:solidFill>
                 <a:latin typeface="Malgun Gothic"/>
               </a:rPr>
-              <a:t>30분 사전 상담 → 대상 업무 1개 선정 → 진단 워크숍 범위 확정 → 견적·일정 승인</a:t>
+              <a:t>바꾸고 싶은 미디어 업무 1건 선정 → 현재 흐름·병목·사람 검토 지점 확인 → 고객별 범위와 가격 가설을 다시 승인한 뒤 견적 제안</a:t>
             </a:r>
           </a:p>
         </p:txBody>
